--- a/digital_signal_path.pptx
+++ b/digital_signal_path.pptx
@@ -3552,6 +3552,431 @@
           </a:p>
         </p:txBody>
       </p:sp>
+      <p:sp>
+        <p:nvSpPr>
+          <p:cNvPr id="4" name="矩形 3">
+            <a:extLst>
+              <a:ext uri="{FF2B5EF4-FFF2-40B4-BE49-F238E27FC236}">
+                <a16:creationId xmlns:a16="http://schemas.microsoft.com/office/drawing/2014/main" id="{485219E8-A8D8-9CC5-CF78-F5729ED1C3DC}"/>
+              </a:ext>
+            </a:extLst>
+          </p:cNvPr>
+          <p:cNvSpPr/>
+          <p:nvPr/>
+        </p:nvSpPr>
+        <p:spPr>
+          <a:xfrm>
+            <a:off x="8361218" y="1101438"/>
+            <a:ext cx="2176896" cy="628650"/>
+          </a:xfrm>
+          <a:prstGeom prst="rect">
+            <a:avLst/>
+          </a:prstGeom>
+        </p:spPr>
+        <p:style>
+          <a:lnRef idx="2">
+            <a:schemeClr val="accent1">
+              <a:shade val="15000"/>
+            </a:schemeClr>
+          </a:lnRef>
+          <a:fillRef idx="1">
+            <a:schemeClr val="accent1"/>
+          </a:fillRef>
+          <a:effectRef idx="0">
+            <a:schemeClr val="accent1"/>
+          </a:effectRef>
+          <a:fontRef idx="minor">
+            <a:schemeClr val="lt1"/>
+          </a:fontRef>
+        </p:style>
+        <p:txBody>
+          <a:bodyPr rtlCol="0" anchor="ctr"/>
+          <a:lstStyle/>
+          <a:p>
+            <a:pPr algn="ctr"/>
+            <a:r>
+              <a:rPr lang="zh-CN" altLang="en-US" dirty="0"/>
+              <a:t>需求和设计文档</a:t>
+            </a:r>
+          </a:p>
+        </p:txBody>
+      </p:sp>
+      <p:sp>
+        <p:nvSpPr>
+          <p:cNvPr id="5" name="矩形 4">
+            <a:extLst>
+              <a:ext uri="{FF2B5EF4-FFF2-40B4-BE49-F238E27FC236}">
+                <a16:creationId xmlns:a16="http://schemas.microsoft.com/office/drawing/2014/main" id="{F5DA2334-FE02-C7D5-CECE-CB776146A6F7}"/>
+              </a:ext>
+            </a:extLst>
+          </p:cNvPr>
+          <p:cNvSpPr/>
+          <p:nvPr/>
+        </p:nvSpPr>
+        <p:spPr>
+          <a:xfrm>
+            <a:off x="8361218" y="2245737"/>
+            <a:ext cx="2176896" cy="628650"/>
+          </a:xfrm>
+          <a:prstGeom prst="rect">
+            <a:avLst/>
+          </a:prstGeom>
+        </p:spPr>
+        <p:style>
+          <a:lnRef idx="2">
+            <a:schemeClr val="accent1">
+              <a:shade val="15000"/>
+            </a:schemeClr>
+          </a:lnRef>
+          <a:fillRef idx="1">
+            <a:schemeClr val="accent1"/>
+          </a:fillRef>
+          <a:effectRef idx="0">
+            <a:schemeClr val="accent1"/>
+          </a:effectRef>
+          <a:fontRef idx="minor">
+            <a:schemeClr val="lt1"/>
+          </a:fontRef>
+        </p:style>
+        <p:txBody>
+          <a:bodyPr rtlCol="0" anchor="ctr"/>
+          <a:lstStyle/>
+          <a:p>
+            <a:pPr algn="ctr"/>
+            <a:r>
+              <a:rPr lang="en-US" altLang="zh-CN" dirty="0" err="1"/>
+              <a:t>Matlab</a:t>
+            </a:r>
+            <a:r>
+              <a:rPr lang="zh-CN" altLang="en-US" dirty="0"/>
+              <a:t>仿真</a:t>
+            </a:r>
+          </a:p>
+        </p:txBody>
+      </p:sp>
+      <p:sp>
+        <p:nvSpPr>
+          <p:cNvPr id="6" name="矩形 5">
+            <a:extLst>
+              <a:ext uri="{FF2B5EF4-FFF2-40B4-BE49-F238E27FC236}">
+                <a16:creationId xmlns:a16="http://schemas.microsoft.com/office/drawing/2014/main" id="{F9DF89F5-E911-6783-5278-A87BF72098D9}"/>
+              </a:ext>
+            </a:extLst>
+          </p:cNvPr>
+          <p:cNvSpPr/>
+          <p:nvPr/>
+        </p:nvSpPr>
+        <p:spPr>
+          <a:xfrm>
+            <a:off x="8361218" y="4534335"/>
+            <a:ext cx="2176896" cy="628650"/>
+          </a:xfrm>
+          <a:prstGeom prst="rect">
+            <a:avLst/>
+          </a:prstGeom>
+        </p:spPr>
+        <p:style>
+          <a:lnRef idx="2">
+            <a:schemeClr val="accent1">
+              <a:shade val="15000"/>
+            </a:schemeClr>
+          </a:lnRef>
+          <a:fillRef idx="1">
+            <a:schemeClr val="accent1"/>
+          </a:fillRef>
+          <a:effectRef idx="0">
+            <a:schemeClr val="accent1"/>
+          </a:effectRef>
+          <a:fontRef idx="minor">
+            <a:schemeClr val="lt1"/>
+          </a:fontRef>
+        </p:style>
+        <p:txBody>
+          <a:bodyPr rtlCol="0" anchor="ctr"/>
+          <a:lstStyle/>
+          <a:p>
+            <a:pPr algn="ctr"/>
+            <a:r>
+              <a:rPr lang="en-US" altLang="zh-CN" dirty="0"/>
+              <a:t>RTL</a:t>
+            </a:r>
+            <a:r>
+              <a:rPr lang="zh-CN" altLang="en-US" dirty="0"/>
+              <a:t>原型设计</a:t>
+            </a:r>
+          </a:p>
+        </p:txBody>
+      </p:sp>
+      <p:sp>
+        <p:nvSpPr>
+          <p:cNvPr id="7" name="矩形 6">
+            <a:extLst>
+              <a:ext uri="{FF2B5EF4-FFF2-40B4-BE49-F238E27FC236}">
+                <a16:creationId xmlns:a16="http://schemas.microsoft.com/office/drawing/2014/main" id="{4232B495-4A23-EC3D-19B0-9E77F51F948C}"/>
+              </a:ext>
+            </a:extLst>
+          </p:cNvPr>
+          <p:cNvSpPr/>
+          <p:nvPr/>
+        </p:nvSpPr>
+        <p:spPr>
+          <a:xfrm>
+            <a:off x="8361218" y="5678634"/>
+            <a:ext cx="2176896" cy="628650"/>
+          </a:xfrm>
+          <a:prstGeom prst="rect">
+            <a:avLst/>
+          </a:prstGeom>
+        </p:spPr>
+        <p:style>
+          <a:lnRef idx="2">
+            <a:schemeClr val="accent1">
+              <a:shade val="15000"/>
+            </a:schemeClr>
+          </a:lnRef>
+          <a:fillRef idx="1">
+            <a:schemeClr val="accent1"/>
+          </a:fillRef>
+          <a:effectRef idx="0">
+            <a:schemeClr val="accent1"/>
+          </a:effectRef>
+          <a:fontRef idx="minor">
+            <a:schemeClr val="lt1"/>
+          </a:fontRef>
+        </p:style>
+        <p:txBody>
+          <a:bodyPr rtlCol="0" anchor="ctr"/>
+          <a:lstStyle/>
+          <a:p>
+            <a:pPr algn="ctr"/>
+            <a:r>
+              <a:rPr lang="en-US" altLang="zh-CN" dirty="0"/>
+              <a:t>FPGA</a:t>
+            </a:r>
+            <a:r>
+              <a:rPr lang="zh-CN" altLang="en-US" dirty="0"/>
+              <a:t>功能验证</a:t>
+            </a:r>
+          </a:p>
+        </p:txBody>
+      </p:sp>
+      <p:sp>
+        <p:nvSpPr>
+          <p:cNvPr id="8" name="矩形 7">
+            <a:extLst>
+              <a:ext uri="{FF2B5EF4-FFF2-40B4-BE49-F238E27FC236}">
+                <a16:creationId xmlns:a16="http://schemas.microsoft.com/office/drawing/2014/main" id="{E0D4B30B-B5B5-33D3-DF11-E1CF879A89F8}"/>
+              </a:ext>
+            </a:extLst>
+          </p:cNvPr>
+          <p:cNvSpPr/>
+          <p:nvPr/>
+        </p:nvSpPr>
+        <p:spPr>
+          <a:xfrm>
+            <a:off x="8361218" y="3390036"/>
+            <a:ext cx="2176896" cy="628650"/>
+          </a:xfrm>
+          <a:prstGeom prst="rect">
+            <a:avLst/>
+          </a:prstGeom>
+        </p:spPr>
+        <p:style>
+          <a:lnRef idx="2">
+            <a:schemeClr val="accent1">
+              <a:shade val="15000"/>
+            </a:schemeClr>
+          </a:lnRef>
+          <a:fillRef idx="1">
+            <a:schemeClr val="accent1"/>
+          </a:fillRef>
+          <a:effectRef idx="0">
+            <a:schemeClr val="accent1"/>
+          </a:effectRef>
+          <a:fontRef idx="minor">
+            <a:schemeClr val="lt1"/>
+          </a:fontRef>
+        </p:style>
+        <p:txBody>
+          <a:bodyPr rtlCol="0" anchor="ctr"/>
+          <a:lstStyle/>
+          <a:p>
+            <a:pPr algn="ctr"/>
+            <a:r>
+              <a:rPr lang="zh-CN" altLang="en-US" dirty="0"/>
+              <a:t>自动化配置软件</a:t>
+            </a:r>
+          </a:p>
+        </p:txBody>
+      </p:sp>
+      <p:cxnSp>
+        <p:nvCxnSpPr>
+          <p:cNvPr id="10" name="直接箭头连接符 9">
+            <a:extLst>
+              <a:ext uri="{FF2B5EF4-FFF2-40B4-BE49-F238E27FC236}">
+                <a16:creationId xmlns:a16="http://schemas.microsoft.com/office/drawing/2014/main" id="{9AFF21FD-7EA4-4982-2CEE-7DA8181C47D0}"/>
+              </a:ext>
+            </a:extLst>
+          </p:cNvPr>
+          <p:cNvCxnSpPr>
+            <a:stCxn id="4" idx="2"/>
+            <a:endCxn id="5" idx="0"/>
+          </p:cNvCxnSpPr>
+          <p:nvPr/>
+        </p:nvCxnSpPr>
+        <p:spPr>
+          <a:xfrm>
+            <a:off x="9449666" y="1730088"/>
+            <a:ext cx="0" cy="515649"/>
+          </a:xfrm>
+          <a:prstGeom prst="straightConnector1">
+            <a:avLst/>
+          </a:prstGeom>
+          <a:ln w="12700">
+            <a:tailEnd type="stealth" w="lg" len="lg"/>
+          </a:ln>
+        </p:spPr>
+        <p:style>
+          <a:lnRef idx="1">
+            <a:schemeClr val="accent1"/>
+          </a:lnRef>
+          <a:fillRef idx="0">
+            <a:schemeClr val="accent1"/>
+          </a:fillRef>
+          <a:effectRef idx="0">
+            <a:schemeClr val="accent1"/>
+          </a:effectRef>
+          <a:fontRef idx="minor">
+            <a:schemeClr val="tx1"/>
+          </a:fontRef>
+        </p:style>
+      </p:cxnSp>
+      <p:cxnSp>
+        <p:nvCxnSpPr>
+          <p:cNvPr id="12" name="直接箭头连接符 11">
+            <a:extLst>
+              <a:ext uri="{FF2B5EF4-FFF2-40B4-BE49-F238E27FC236}">
+                <a16:creationId xmlns:a16="http://schemas.microsoft.com/office/drawing/2014/main" id="{1F356F9F-1129-4405-AF64-BF495FE02482}"/>
+              </a:ext>
+            </a:extLst>
+          </p:cNvPr>
+          <p:cNvCxnSpPr>
+            <a:stCxn id="5" idx="2"/>
+            <a:endCxn id="8" idx="0"/>
+          </p:cNvCxnSpPr>
+          <p:nvPr/>
+        </p:nvCxnSpPr>
+        <p:spPr>
+          <a:xfrm>
+            <a:off x="9449666" y="2874387"/>
+            <a:ext cx="0" cy="515649"/>
+          </a:xfrm>
+          <a:prstGeom prst="straightConnector1">
+            <a:avLst/>
+          </a:prstGeom>
+          <a:ln w="12700">
+            <a:tailEnd type="stealth" w="lg" len="lg"/>
+          </a:ln>
+        </p:spPr>
+        <p:style>
+          <a:lnRef idx="1">
+            <a:schemeClr val="accent1"/>
+          </a:lnRef>
+          <a:fillRef idx="0">
+            <a:schemeClr val="accent1"/>
+          </a:fillRef>
+          <a:effectRef idx="0">
+            <a:schemeClr val="accent1"/>
+          </a:effectRef>
+          <a:fontRef idx="minor">
+            <a:schemeClr val="tx1"/>
+          </a:fontRef>
+        </p:style>
+      </p:cxnSp>
+      <p:cxnSp>
+        <p:nvCxnSpPr>
+          <p:cNvPr id="14" name="直接箭头连接符 13">
+            <a:extLst>
+              <a:ext uri="{FF2B5EF4-FFF2-40B4-BE49-F238E27FC236}">
+                <a16:creationId xmlns:a16="http://schemas.microsoft.com/office/drawing/2014/main" id="{8EF4B217-927E-105D-733A-0158833A0B8A}"/>
+              </a:ext>
+            </a:extLst>
+          </p:cNvPr>
+          <p:cNvCxnSpPr>
+            <a:stCxn id="8" idx="2"/>
+            <a:endCxn id="6" idx="0"/>
+          </p:cNvCxnSpPr>
+          <p:nvPr/>
+        </p:nvCxnSpPr>
+        <p:spPr>
+          <a:xfrm>
+            <a:off x="9449666" y="4018686"/>
+            <a:ext cx="0" cy="515649"/>
+          </a:xfrm>
+          <a:prstGeom prst="straightConnector1">
+            <a:avLst/>
+          </a:prstGeom>
+          <a:ln w="12700">
+            <a:tailEnd type="stealth" w="lg" len="lg"/>
+          </a:ln>
+        </p:spPr>
+        <p:style>
+          <a:lnRef idx="1">
+            <a:schemeClr val="accent1"/>
+          </a:lnRef>
+          <a:fillRef idx="0">
+            <a:schemeClr val="accent1"/>
+          </a:fillRef>
+          <a:effectRef idx="0">
+            <a:schemeClr val="accent1"/>
+          </a:effectRef>
+          <a:fontRef idx="minor">
+            <a:schemeClr val="tx1"/>
+          </a:fontRef>
+        </p:style>
+      </p:cxnSp>
+      <p:cxnSp>
+        <p:nvCxnSpPr>
+          <p:cNvPr id="16" name="直接箭头连接符 15">
+            <a:extLst>
+              <a:ext uri="{FF2B5EF4-FFF2-40B4-BE49-F238E27FC236}">
+                <a16:creationId xmlns:a16="http://schemas.microsoft.com/office/drawing/2014/main" id="{913A6C8B-7343-71BB-F0C3-3377C285DB76}"/>
+              </a:ext>
+            </a:extLst>
+          </p:cNvPr>
+          <p:cNvCxnSpPr>
+            <a:stCxn id="6" idx="2"/>
+            <a:endCxn id="7" idx="0"/>
+          </p:cNvCxnSpPr>
+          <p:nvPr/>
+        </p:nvCxnSpPr>
+        <p:spPr>
+          <a:xfrm>
+            <a:off x="9449666" y="5162985"/>
+            <a:ext cx="0" cy="515649"/>
+          </a:xfrm>
+          <a:prstGeom prst="straightConnector1">
+            <a:avLst/>
+          </a:prstGeom>
+          <a:ln w="12700">
+            <a:tailEnd type="stealth" w="lg" len="lg"/>
+          </a:ln>
+        </p:spPr>
+        <p:style>
+          <a:lnRef idx="1">
+            <a:schemeClr val="accent1"/>
+          </a:lnRef>
+          <a:fillRef idx="0">
+            <a:schemeClr val="accent1"/>
+          </a:fillRef>
+          <a:effectRef idx="0">
+            <a:schemeClr val="accent1"/>
+          </a:effectRef>
+          <a:fontRef idx="minor">
+            <a:schemeClr val="tx1"/>
+          </a:fontRef>
+        </p:style>
+      </p:cxnSp>
     </p:spTree>
     <p:extLst>
       <p:ext uri="{BB962C8B-B14F-4D97-AF65-F5344CB8AC3E}">
@@ -4507,11 +4932,11 @@
               <a:buAutoNum type="arabicPeriod"/>
             </a:pPr>
             <a:r>
-              <a:rPr lang="en-US" altLang="zh-CN" sz="2400" b="1" dirty="0"/>
+              <a:rPr lang="en-US" altLang="zh-CN" sz="2400" dirty="0"/>
               <a:t>Design: </a:t>
             </a:r>
             <a:r>
-              <a:rPr lang="en-US" altLang="zh-CN" sz="2400" b="1" dirty="0" err="1"/>
+              <a:rPr lang="en-US" altLang="zh-CN" sz="2400" dirty="0" err="1"/>
               <a:t>rtl</a:t>
             </a:r>
             <a:endParaRPr lang="en-US" altLang="zh-CN" sz="2000" dirty="0"/>
@@ -4521,7 +4946,7 @@
               <a:buAutoNum type="arabicPeriod"/>
             </a:pPr>
             <a:r>
-              <a:rPr lang="en-US" altLang="zh-CN" sz="2400" b="1" dirty="0"/>
+              <a:rPr lang="en-US" altLang="zh-CN" sz="2400" dirty="0"/>
               <a:t>Testbench: tb</a:t>
             </a:r>
             <a:endParaRPr lang="en-US" altLang="zh-CN" sz="2000" dirty="0"/>
@@ -4531,7 +4956,7 @@
               <a:buAutoNum type="arabicPeriod"/>
             </a:pPr>
             <a:r>
-              <a:rPr lang="en-US" altLang="zh-CN" sz="2400" b="1" dirty="0"/>
+              <a:rPr lang="en-US" altLang="zh-CN" sz="2400" dirty="0"/>
               <a:t>Scripts</a:t>
             </a:r>
           </a:p>
